--- a/11a/1. Presentations/Multimedia/Light, Contrast, Color.pptx
+++ b/11a/1. Presentations/Multimedia/Light, Contrast, Color.pptx
@@ -240,7 +240,7 @@
           <a:p>
             <a:fld id="{7081047C-EC3D-40E8-9316-514CB59E1AAF}" type="datetimeFigureOut">
               <a:rPr lang="en-US" smtClean="0"/>
-              <a:t>2/12/2025</a:t>
+              <a:t>2/28/2025</a:t>
             </a:fld>
             <a:endParaRPr lang="en-US"/>
           </a:p>
@@ -3436,7 +3436,7 @@
           <a:p>
             <a:fld id="{0E0A08B9-33EB-451B-968E-B60796E91785}" type="datetimeFigureOut">
               <a:rPr lang="en-US" smtClean="0"/>
-              <a:t>2/12/2025</a:t>
+              <a:t>2/28/2025</a:t>
             </a:fld>
             <a:endParaRPr lang="en-US"/>
           </a:p>
@@ -3646,7 +3646,7 @@
           <a:p>
             <a:fld id="{0E0A08B9-33EB-451B-968E-B60796E91785}" type="datetimeFigureOut">
               <a:rPr lang="en-US" smtClean="0"/>
-              <a:t>2/12/2025</a:t>
+              <a:t>2/28/2025</a:t>
             </a:fld>
             <a:endParaRPr lang="en-US"/>
           </a:p>
@@ -3866,7 +3866,7 @@
           <a:p>
             <a:fld id="{0E0A08B9-33EB-451B-968E-B60796E91785}" type="datetimeFigureOut">
               <a:rPr lang="en-US" smtClean="0"/>
-              <a:t>2/12/2025</a:t>
+              <a:t>2/28/2025</a:t>
             </a:fld>
             <a:endParaRPr lang="en-US"/>
           </a:p>
@@ -4076,7 +4076,7 @@
           <a:p>
             <a:fld id="{0E0A08B9-33EB-451B-968E-B60796E91785}" type="datetimeFigureOut">
               <a:rPr lang="en-US" smtClean="0"/>
-              <a:t>2/12/2025</a:t>
+              <a:t>2/28/2025</a:t>
             </a:fld>
             <a:endParaRPr lang="en-US"/>
           </a:p>
@@ -4363,7 +4363,7 @@
           <a:p>
             <a:fld id="{0E0A08B9-33EB-451B-968E-B60796E91785}" type="datetimeFigureOut">
               <a:rPr lang="en-US" smtClean="0"/>
-              <a:t>2/12/2025</a:t>
+              <a:t>2/28/2025</a:t>
             </a:fld>
             <a:endParaRPr lang="en-US"/>
           </a:p>
@@ -4640,7 +4640,7 @@
           <a:p>
             <a:fld id="{0E0A08B9-33EB-451B-968E-B60796E91785}" type="datetimeFigureOut">
               <a:rPr lang="en-US" smtClean="0"/>
-              <a:t>2/12/2025</a:t>
+              <a:t>2/28/2025</a:t>
             </a:fld>
             <a:endParaRPr lang="en-US"/>
           </a:p>
@@ -5064,7 +5064,7 @@
           <a:p>
             <a:fld id="{0E0A08B9-33EB-451B-968E-B60796E91785}" type="datetimeFigureOut">
               <a:rPr lang="en-US" smtClean="0"/>
-              <a:t>2/12/2025</a:t>
+              <a:t>2/28/2025</a:t>
             </a:fld>
             <a:endParaRPr lang="en-US"/>
           </a:p>
@@ -5217,7 +5217,7 @@
           <a:p>
             <a:fld id="{0E0A08B9-33EB-451B-968E-B60796E91785}" type="datetimeFigureOut">
               <a:rPr lang="en-US" smtClean="0"/>
-              <a:t>2/12/2025</a:t>
+              <a:t>2/28/2025</a:t>
             </a:fld>
             <a:endParaRPr lang="en-US"/>
           </a:p>
@@ -5342,7 +5342,7 @@
           <a:p>
             <a:fld id="{0E0A08B9-33EB-451B-968E-B60796E91785}" type="datetimeFigureOut">
               <a:rPr lang="en-US" smtClean="0"/>
-              <a:t>2/12/2025</a:t>
+              <a:t>2/28/2025</a:t>
             </a:fld>
             <a:endParaRPr lang="en-US"/>
           </a:p>
@@ -5665,7 +5665,7 @@
           <a:p>
             <a:fld id="{0E0A08B9-33EB-451B-968E-B60796E91785}" type="datetimeFigureOut">
               <a:rPr lang="en-US" smtClean="0"/>
-              <a:t>2/12/2025</a:t>
+              <a:t>2/28/2025</a:t>
             </a:fld>
             <a:endParaRPr lang="en-US"/>
           </a:p>
@@ -5965,7 +5965,7 @@
           <a:p>
             <a:fld id="{0E0A08B9-33EB-451B-968E-B60796E91785}" type="datetimeFigureOut">
               <a:rPr lang="en-US" smtClean="0"/>
-              <a:t>2/12/2025</a:t>
+              <a:t>2/28/2025</a:t>
             </a:fld>
             <a:endParaRPr lang="en-US"/>
           </a:p>
@@ -6218,7 +6218,7 @@
           <a:p>
             <a:fld id="{0E0A08B9-33EB-451B-968E-B60796E91785}" type="datetimeFigureOut">
               <a:rPr lang="en-US" smtClean="0"/>
-              <a:t>2/12/2025</a:t>
+              <a:t>2/28/2025</a:t>
             </a:fld>
             <a:endParaRPr lang="en-US"/>
           </a:p>
